--- a/content/W01/D2/slides/C2_W01_D02_half1_STUDENT.pptx
+++ b/content/W01/D2/slides/C2_W01_D02_half1_STUDENT.pptx
@@ -4778,14 +4778,14 @@
       </p:sp>
       <p:pic>
         <p:nvPicPr>
-          <p:cNvPr id="6" name="Picture 5" descr="058f5a94736f2eb7.png"/>
+          <p:cNvPr id="6" name="Picture 5" descr="68e551e8143b1fef.png"/>
           <p:cNvPicPr>
             <a:picLocks noChangeAspect="1"/>
           </p:cNvPicPr>
           <p:nvPr/>
         </p:nvPicPr>
         <p:blipFill>
-          <a:blip r:embed="rId2"/>
+          <a:blip r:embed="rId3"/>
           <a:stretch>
             <a:fillRect/>
           </a:stretch>
@@ -6392,14 +6392,14 @@
       </p:sp>
       <p:pic>
         <p:nvPicPr>
-          <p:cNvPr id="6" name="Picture 5" descr="cddd443cd22e1ef5.png"/>
+          <p:cNvPr id="6" name="Picture 5" descr="a9934a7417680463.png"/>
           <p:cNvPicPr>
             <a:picLocks noChangeAspect="1"/>
           </p:cNvPicPr>
           <p:nvPr/>
         </p:nvPicPr>
         <p:blipFill>
-          <a:blip r:embed="rId2"/>
+          <a:blip r:embed="rId3"/>
           <a:stretch>
             <a:fillRect/>
           </a:stretch>
@@ -6761,14 +6761,14 @@
       </p:sp>
       <p:pic>
         <p:nvPicPr>
-          <p:cNvPr id="6" name="Picture 5" descr="6ff71d0fb790bffe.png"/>
+          <p:cNvPr id="6" name="Picture 5" descr="cda490c174680ccf.png"/>
           <p:cNvPicPr>
             <a:picLocks noChangeAspect="1"/>
           </p:cNvPicPr>
           <p:nvPr/>
         </p:nvPicPr>
         <p:blipFill>
-          <a:blip r:embed="rId2"/>
+          <a:blip r:embed="rId3"/>
           <a:stretch>
             <a:fillRect/>
           </a:stretch>
@@ -9423,14 +9423,14 @@
       </p:sp>
       <p:pic>
         <p:nvPicPr>
-          <p:cNvPr id="6" name="Picture 5" descr="a19f13ce79782494.png"/>
+          <p:cNvPr id="6" name="Picture 5" descr="3cf9722dfc115fd6.png"/>
           <p:cNvPicPr>
             <a:picLocks noChangeAspect="1"/>
           </p:cNvPicPr>
           <p:nvPr/>
         </p:nvPicPr>
         <p:blipFill>
-          <a:blip r:embed="rId2"/>
+          <a:blip r:embed="rId3"/>
           <a:stretch>
             <a:fillRect/>
           </a:stretch>

--- a/content/W01/D2/slides/C2_W01_D02_half1_STUDENT.pptx
+++ b/content/W01/D2/slides/C2_W01_D02_half1_STUDENT.pptx
@@ -4778,7 +4778,7 @@
       </p:sp>
       <p:pic>
         <p:nvPicPr>
-          <p:cNvPr id="6" name="Picture 5" descr="68e551e8143b1fef.png"/>
+          <p:cNvPr id="6" name="Picture 5" descr="1c9048a925d62d3c.png"/>
           <p:cNvPicPr>
             <a:picLocks noChangeAspect="1"/>
           </p:cNvPicPr>
@@ -4792,8 +4792,8 @@
         </p:blipFill>
         <p:spPr>
           <a:xfrm>
-            <a:off x="1819367" y="1517904"/>
-            <a:ext cx="8552959" cy="3325368"/>
+            <a:off x="2270265" y="1517904"/>
+            <a:ext cx="7651164" cy="3325368"/>
           </a:xfrm>
           <a:prstGeom prst="rect">
             <a:avLst/>
@@ -6392,7 +6392,7 @@
       </p:sp>
       <p:pic>
         <p:nvPicPr>
-          <p:cNvPr id="6" name="Picture 5" descr="a9934a7417680463.png"/>
+          <p:cNvPr id="6" name="Picture 5" descr="066fbe84983bf7f7.png"/>
           <p:cNvPicPr>
             <a:picLocks noChangeAspect="1"/>
           </p:cNvPicPr>
@@ -6406,8 +6406,8 @@
         </p:blipFill>
         <p:spPr>
           <a:xfrm>
-            <a:off x="685800" y="2124269"/>
-            <a:ext cx="10820095" cy="2721221"/>
+            <a:off x="685800" y="1910594"/>
+            <a:ext cx="10820095" cy="3148572"/>
           </a:xfrm>
           <a:prstGeom prst="rect">
             <a:avLst/>
@@ -6422,7 +6422,7 @@
         </p:nvSpPr>
         <p:spPr>
           <a:xfrm>
-            <a:off x="685800" y="4991794"/>
+            <a:off x="685800" y="5205470"/>
             <a:ext cx="10820095" cy="564896"/>
           </a:xfrm>
           <a:prstGeom prst="rect">
@@ -6761,7 +6761,7 @@
       </p:sp>
       <p:pic>
         <p:nvPicPr>
-          <p:cNvPr id="6" name="Picture 5" descr="cda490c174680ccf.png"/>
+          <p:cNvPr id="6" name="Picture 5" descr="84f7f0d871366809.png"/>
           <p:cNvPicPr>
             <a:picLocks noChangeAspect="1"/>
           </p:cNvPicPr>
@@ -6775,8 +6775,8 @@
         </p:blipFill>
         <p:spPr>
           <a:xfrm>
-            <a:off x="685800" y="2773202"/>
-            <a:ext cx="10820095" cy="1077916"/>
+            <a:off x="685800" y="2757823"/>
+            <a:ext cx="10820095" cy="1108673"/>
           </a:xfrm>
           <a:prstGeom prst="rect">
             <a:avLst/>
@@ -6791,7 +6791,7 @@
         </p:nvSpPr>
         <p:spPr>
           <a:xfrm>
-            <a:off x="685800" y="3997422"/>
+            <a:off x="685800" y="4012800"/>
             <a:ext cx="10820095" cy="910336"/>
           </a:xfrm>
           <a:prstGeom prst="rect">
@@ -9423,7 +9423,7 @@
       </p:sp>
       <p:pic>
         <p:nvPicPr>
-          <p:cNvPr id="6" name="Picture 5" descr="3cf9722dfc115fd6.png"/>
+          <p:cNvPr id="6" name="Picture 5" descr="f8bd5b993a96aec5.png"/>
           <p:cNvPicPr>
             <a:picLocks noChangeAspect="1"/>
           </p:cNvPicPr>
@@ -9437,8 +9437,8 @@
         </p:blipFill>
         <p:spPr>
           <a:xfrm>
-            <a:off x="4983433" y="1517904"/>
-            <a:ext cx="2224828" cy="4016248"/>
+            <a:off x="4857408" y="1517904"/>
+            <a:ext cx="2476879" cy="4016248"/>
           </a:xfrm>
           <a:prstGeom prst="rect">
             <a:avLst/>

--- a/content/W01/D2/slides/C2_W01_D02_half1_STUDENT.pptx
+++ b/content/W01/D2/slides/C2_W01_D02_half1_STUDENT.pptx
@@ -2067,12 +2067,17 @@
           <a:lstStyle/>
           <a:p>
             <a:r>
-              <a:t>LIVE, 4 minutes. This is the round's trap. The hurried default silences the error and the story</a:t>
-            </a:r>
-          </a:p>
-          <a:p>
-            <a:r>
-              <a:t>writes itself: discounts fell 8.0 percent, members pulled back, restore the discounts. The three</a:t>
+              <a:t>LIVE, 4 minutes. This is the round's trap. The hurried default silences the error, and the share of</a:t>
+            </a:r>
+          </a:p>
+          <a:p>
+            <a:r>
+              <a:t>Q2 orders with a discount above zero comes out at 50.0 percent, 43 of 86. The story writes itself:</a:t>
+            </a:r>
+          </a:p>
+          <a:p>
+            <a:r>
+              <a:t>half the orders went without, so Marketing extends the monsoon discount to the other half. The three</a:t>
             </a:r>
           </a:p>
           <a:p>
@@ -2082,7 +2087,7 @@
           </a:p>
           <a:p>
             <a:r>
-              <a:t>unknown. The default of zero erases the difference, and the total becomes a floor nobody labelled.</a:t>
+              <a:t>unknown. The default of zero files C beside B, and the share becomes a floor nobody labelled.</a:t>
             </a:r>
           </a:p>
         </p:txBody>
@@ -2152,12 +2157,17 @@
           <a:lstStyle/>
           <a:p>
             <a:r>
-              <a:t>LIVE, 3 minutes. Before running, each learner counts the orders that record the field in each</a:t>
-            </a:r>
-          </a:p>
-          <a:p>
-            <a:r>
-              <a:t>quarter in the empty your-turn cell of notebook 02. Nobody reads a count aloud. Then take letters.</a:t>
+              <a:t>LIVE, 3 minutes. Before the answer, each learner runs the count in the empty your-turn cell of</a:t>
+            </a:r>
+          </a:p>
+          <a:p>
+            <a:r>
+              <a:t>notebook 02: orders with no discount field, per quarter. Then take letters. Anyone who says a) has</a:t>
+            </a:r>
+          </a:p>
+          <a:p>
+            <a:r>
+              <a:t>not yet separated a recorded zero from a field nobody wrote.</a:t>
             </a:r>
           </a:p>
         </p:txBody>
@@ -2227,32 +2237,32 @@
           <a:lstStyle/>
           <a:p>
             <a:r>
-              <a:t>LIVE, 5 minutes. The answer is d: the direction flipped. Three moves. First, the decision goes in</a:t>
-            </a:r>
-          </a:p>
-          <a:p>
-            <a:r>
-              <a:t>writing beside the number. Second, ask who wrote the records without the field: an older checkout, a</a:t>
-            </a:r>
-          </a:p>
-          <a:p>
-            <a:r>
-              <a:t>channel, a batch. Statisticians separate data missing at random from data missing for a reason</a:t>
-            </a:r>
-          </a:p>
-          <a:p>
-            <a:r>
-              <a:t>(Rubin, 1976, "Inference and missing data", Biometrika); the business version is "which system</a:t>
-            </a:r>
-          </a:p>
-          <a:p>
-            <a:r>
-              <a:t>left it empty, and does that system sell differently?". Third, a bound: the largest recorded</a:t>
-            </a:r>
-          </a:p>
-          <a:p>
-            <a:r>
-              <a:t>discount is Rs 150, so the branch is at most Rs 12,900 against Rs 23,00,000, under one percent.</a:t>
+              <a:t>LIVE, 5 minutes. The answer is c: 17 recorded zeros and 26 records with no field. Three moves.</a:t>
+            </a:r>
+          </a:p>
+          <a:p>
+            <a:r>
+              <a:t>First, the decision goes in writing beside the number. Second, ask who wrote the records without the</a:t>
+            </a:r>
+          </a:p>
+          <a:p>
+            <a:r>
+              <a:t>field: an older checkout, a channel, a batch. Statisticians separate data missing at random from</a:t>
+            </a:r>
+          </a:p>
+          <a:p>
+            <a:r>
+              <a:t>data missing for a reason (Rubin, 1976, "Inference and missing data", Biometrika); the business</a:t>
+            </a:r>
+          </a:p>
+          <a:p>
+            <a:r>
+              <a:t>version is "which system left it empty, and does that system sell differently?". Third, a bound: the</a:t>
+            </a:r>
+          </a:p>
+          <a:p>
+            <a:r>
+              <a:t>share lies between 50.0 and 80.2 percent, and in rupees the branch is under one percent of the fall.</a:t>
             </a:r>
           </a:p>
           <a:p>
@@ -2672,7 +2682,7 @@
           </a:p>
           <a:p>
             <a:r>
-              <a:t>whether it is everyone. This table is a lens, not an answer: it says which number to read first for</a:t>
+              <a:t>whether it is everyone. This table is a lens that points the question: it says which number to read first for</a:t>
             </a:r>
           </a:p>
           <a:p>
@@ -3362,7 +3372,7 @@
           </a:p>
           <a:p>
             <a:r>
-              <a:t>acquire, so it reads every fall as an acquisition problem; that is structure, not bad faith. The</a:t>
+              <a:t>acquire, so it reads every fall as an acquisition problem; that is how the role is paid, and it says nothing about good faith. The</a:t>
             </a:r>
           </a:p>
           <a:p>
@@ -3622,7 +3632,7 @@
           </a:p>
           <a:p>
             <a:r>
-              <a:t>quantity. The HBR figures are published estimates across industries, not Kalpa's numbers; say so.</a:t>
+              <a:t>quantity. The HBR figures are published estimates across industries, and Kalpa has none of its own yet; say so.</a:t>
             </a:r>
           </a:p>
           <a:p>
@@ -3717,7 +3727,7 @@
           </a:p>
           <a:p>
             <a:r>
-              <a:t>the system, not only in the arithmetic: where the data is written, moved and summarised. Keep every</a:t>
+              <a:t>the system as well as in the arithmetic: where the data is written, moved and summarised. Keep every</a:t>
             </a:r>
           </a:p>
           <a:p>
@@ -3807,12 +3817,12 @@
           </a:p>
           <a:p>
             <a:r>
-              <a:t>dashboard's roll-up. Engineers in a GCC are asked this constantly: the drop was a pipeline, not a</a:t>
-            </a:r>
-          </a:p>
-          <a:p>
-            <a:r>
-              <a:t>market. Checking the pipeline first is the cheapest investigation there is.</a:t>
+              <a:t>dashboard's roll-up. Engineers in a GCC are asked this constantly: the drop sat in a</a:t>
+            </a:r>
+          </a:p>
+          <a:p>
+            <a:r>
+              <a:t>pipeline while the market held. Checking the pipeline first is the cheapest investigation there is.</a:t>
             </a:r>
           </a:p>
         </p:txBody>
@@ -8196,7 +8206,7 @@
                 </a:solidFill>
                 <a:latin typeface="Calibri"/>
               </a:rPr>
-              <a:t>Week 1 Day 2: which branch moved</a:t>
+              <a:t>Week 1, Day 2. Which branch moved</a:t>
             </a:r>
           </a:p>
         </p:txBody>
@@ -12498,7 +12508,7 @@
       </p:sp>
       <p:pic>
         <p:nvPicPr>
-          <p:cNvPr id="9" name="mermaid diagram" descr="275444f253222592.png"/>
+          <p:cNvPr id="9" name="mermaid diagram" descr="0f9efb18d998f26c.png"/>
           <p:cNvPicPr>
             <a:picLocks noChangeAspect="1"/>
           </p:cNvPicPr>
@@ -17529,7 +17539,7 @@
                 </a:solidFill>
                 <a:latin typeface="Calibri"/>
               </a:rPr>
-              <a:t>Week 1 Day 2: which branch moved</a:t>
+              <a:t>Week 1, Day 2. Which branch moved</a:t>
             </a:r>
           </a:p>
         </p:txBody>
@@ -18095,7 +18105,7 @@
                 </a:solidFill>
                 <a:latin typeface="Calibri"/>
               </a:rPr>
-              <a:t>Week 1 Day 2: which branch moved</a:t>
+              <a:t>Week 1, Day 2. Which branch moved</a:t>
             </a:r>
           </a:p>
         </p:txBody>
@@ -23822,7 +23832,7 @@
                 </a:solidFill>
                 <a:latin typeface="Georgia"/>
               </a:rPr>
-              <a:t>The wrong answer: discounts fell 8.0 percent</a:t>
+              <a:t>The wrong answer: half the orders had no discount</a:t>
             </a:r>
           </a:p>
         </p:txBody>
@@ -23857,14 +23867,14 @@
                 </a:solidFill>
                 <a:latin typeface="Calibri"/>
               </a:rPr>
-              <a:t>Reading a missing discount as zero gives a total, a story and a decision.</a:t>
+              <a:t>Reading a missing discount as zero gives a share, a story and a decision.</a:t>
             </a:r>
           </a:p>
         </p:txBody>
       </p:sp>
       <p:pic>
         <p:nvPicPr>
-          <p:cNvPr id="9" name="mermaid diagram" descr="13c8547a3e45438c.png"/>
+          <p:cNvPr id="9" name="mermaid diagram" descr="26cea2eaab6cb7bd.png"/>
           <p:cNvPicPr>
             <a:picLocks noChangeAspect="1"/>
           </p:cNvPicPr>
@@ -23878,8 +23888,8 @@
         </p:blipFill>
         <p:spPr>
           <a:xfrm>
-            <a:off x="2495397" y="1956816"/>
-            <a:ext cx="7200900" cy="1128712"/>
+            <a:off x="3095472" y="1956816"/>
+            <a:ext cx="6000750" cy="1128712"/>
           </a:xfrm>
           <a:prstGeom prst="rect">
             <a:avLst/>
@@ -23905,10 +23915,10 @@
                 <a:tableStyleId>{2D5ABB26-0587-4C30-8999-92F81FD0307C}</a:tableStyleId>
               </a:tblPr>
               <a:tblGrid>
-                <a:gridCol w="2915390"/>
-                <a:gridCol w="2915390"/>
-                <a:gridCol w="2561676"/>
-                <a:gridCol w="2738533"/>
+                <a:gridCol w="3491920"/>
+                <a:gridCol w="2710802"/>
+                <a:gridCol w="2381911"/>
+                <a:gridCol w="2546356"/>
               </a:tblGrid>
               <a:tr h="335280">
                 <a:tc>
@@ -24193,7 +24203,7 @@
                           </a:solidFill>
                           <a:latin typeface="Calibri"/>
                         </a:rPr>
-                        <a:t>Average</a:t>
+                        <a:t>Share with a discount</a:t>
                       </a:r>
                     </a:p>
                   </a:txBody>
@@ -24227,7 +24237,7 @@
                           </a:solidFill>
                           <a:latin typeface="Calibri"/>
                         </a:rPr>
-                        <a:t>Rs 33</a:t>
+                        <a:t>1 of 3, 33%</a:t>
                       </a:r>
                     </a:p>
                   </a:txBody>
@@ -24249,7 +24259,7 @@
                           </a:solidFill>
                           <a:latin typeface="Calibri"/>
                         </a:rPr>
-                        <a:t>Rs 50</a:t>
+                        <a:t>1 of 2, 50%</a:t>
                       </a:r>
                     </a:p>
                   </a:txBody>
@@ -24816,7 +24826,7 @@
                 </a:solidFill>
                 <a:latin typeface="Georgia"/>
               </a:rPr>
-              <a:t>Question: the average where a discount is recorded?</a:t>
+              <a:t>Question: what were the 43 "no discount" orders?</a:t>
             </a:r>
           </a:p>
         </p:txBody>
@@ -24851,7 +24861,7 @@
                 </a:solidFill>
                 <a:latin typeface="Calibri"/>
               </a:rPr>
-              <a:t>Q1 averages Rs 60.98 per order that records one; predict Q2.</a:t>
+              <a:t>The hurried reading says 43 of Q2's 86 orders went without; predict what they are.</a:t>
             </a:r>
           </a:p>
         </p:txBody>
@@ -24886,7 +24896,7 @@
                 </a:solidFill>
                 <a:latin typeface="Georgia"/>
               </a:rPr>
-              <a:t>Rs 43.86</a:t>
+              <a:t>42.1%</a:t>
             </a:r>
           </a:p>
         </p:txBody>
@@ -24956,7 +24966,7 @@
                 </a:solidFill>
                 <a:latin typeface="Calibri"/>
               </a:rPr>
-              <a:t>per order</a:t>
+              <a:t>orders with a discount</a:t>
             </a:r>
           </a:p>
         </p:txBody>
@@ -25035,7 +25045,7 @@
                 </a:solidFill>
                 <a:latin typeface="Georgia"/>
               </a:rPr>
-              <a:t>Rs 53.49</a:t>
+              <a:t>50.0%</a:t>
             </a:r>
           </a:p>
         </p:txBody>
@@ -25105,7 +25115,7 @@
                 </a:solidFill>
                 <a:latin typeface="Calibri"/>
               </a:rPr>
-              <a:t>per order</a:t>
+              <a:t>orders with a discount</a:t>
             </a:r>
           </a:p>
         </p:txBody>
@@ -25184,7 +25194,7 @@
                 </a:solidFill>
                 <a:latin typeface="Georgia"/>
               </a:rPr>
-              <a:t>Rs 60.98</a:t>
+              <a:t>43</a:t>
             </a:r>
           </a:p>
         </p:txBody>
@@ -25219,7 +25229,7 @@
                 </a:solidFill>
                 <a:latin typeface="Calibri"/>
               </a:rPr>
-              <a:t>Q1, RECORDED ONLY</a:t>
+              <a:t>Q2, READ AS NONE</a:t>
             </a:r>
           </a:p>
         </p:txBody>
@@ -25254,7 +25264,7 @@
                 </a:solidFill>
                 <a:latin typeface="Calibri"/>
               </a:rPr>
-              <a:t>per order that records it</a:t>
+              <a:t>of 86 orders</a:t>
             </a:r>
           </a:p>
         </p:txBody>
@@ -25435,7 +25445,7 @@
                 </a:solidFill>
                 <a:latin typeface="Calibri"/>
               </a:rPr>
-              <a:t>Predict Q2's average over orders that record a discount: a) Rs 53.49, the same; b) Rs 46.00, down; c) Rs 60.98, flat; d) Rs 76.67, up.</a:t>
+              <a:t>Of the 43 Q2 orders read as "no discount", how many record Rs 0? a) all 43; b) 34; c) 17; d) none.</a:t>
             </a:r>
           </a:p>
         </p:txBody>
@@ -25992,7 +26002,7 @@
                 </a:solidFill>
                 <a:latin typeface="Georgia"/>
               </a:rPr>
-              <a:t>Answer: up 25.7 percent, and a bound on the branch</a:t>
+              <a:t>Answer: 17 recorded zeros and 26 unknowns</a:t>
             </a:r>
           </a:p>
         </p:txBody>
@@ -26027,7 +26037,7 @@
                 </a:solidFill>
                 <a:latin typeface="Calibri"/>
               </a:rPr>
-              <a:t>Where it is recorded, the discount rose; and even at its worst, the branch is too small to matter.</a:t>
+              <a:t>Where the field is recorded, 71.7 percent of Q2's orders carry a discount, and the rest is a range.</a:t>
             </a:r>
           </a:p>
         </p:txBody>
@@ -26042,7 +26052,7 @@
         </p:nvGraphicFramePr>
         <p:xfrm>
           <a:off x="530352" y="1956816"/>
-          <a:ext cx="11130990" cy="1341120"/>
+          <a:ext cx="11130990" cy="1849120"/>
         </p:xfrm>
         <a:graphic>
           <a:graphicData uri="http://schemas.openxmlformats.org/drawingml/2006/table">
@@ -26051,25 +26061,24 @@
                 <a:tableStyleId>{2D5ABB26-0587-4C30-8999-92F81FD0307C}</a:tableStyleId>
               </a:tblPr>
               <a:tblGrid>
-                <a:gridCol w="5567157"/>
-                <a:gridCol w="914400"/>
-                <a:gridCol w="1498212"/>
-                <a:gridCol w="3151221"/>
+                <a:gridCol w="5667442"/>
+                <a:gridCol w="2808144"/>
+                <a:gridCol w="2655404"/>
               </a:tblGrid>
-              <a:tr h="335280">
+              <a:tr h="369824">
                 <a:tc>
                   <a:txBody>
                     <a:bodyPr/>
                     <a:lstStyle/>
                     <a:p>
                       <a:r>
-                        <a:rPr sz="1250" b="1" i="0">
+                        <a:rPr sz="1450" b="1" i="0">
                           <a:solidFill>
                             <a:srgbClr val="FFFFFF"/>
                           </a:solidFill>
                           <a:latin typeface="Calibri"/>
                         </a:rPr>
-                        <a:t>Reading</a:t>
+                        <a:t>Share of orders with a discount</a:t>
                       </a:r>
                     </a:p>
                   </a:txBody>
@@ -26085,7 +26094,7 @@
                     <a:lstStyle/>
                     <a:p>
                       <a:r>
-                        <a:rPr sz="1250" b="1" i="0">
+                        <a:rPr sz="1450" b="1" i="0">
                           <a:solidFill>
                             <a:srgbClr val="FFFFFF"/>
                           </a:solidFill>
@@ -26107,7 +26116,7 @@
                     <a:lstStyle/>
                     <a:p>
                       <a:r>
-                        <a:rPr sz="1250" b="1" i="0">
+                        <a:rPr sz="1450" b="1" i="0">
                           <a:solidFill>
                             <a:srgbClr val="FFFFFF"/>
                           </a:solidFill>
@@ -26123,43 +26132,21 @@
                     </a:solidFill>
                   </a:tcPr>
                 </a:tc>
+              </a:tr>
+              <a:tr h="369824">
                 <a:tc>
                   <a:txBody>
                     <a:bodyPr/>
                     <a:lstStyle/>
                     <a:p>
                       <a:r>
-                        <a:rPr sz="1250" b="1" i="0">
-                          <a:solidFill>
-                            <a:srgbClr val="FFFFFF"/>
-                          </a:solidFill>
-                          <a:latin typeface="Calibri"/>
-                        </a:rPr>
-                        <a:t>Change</a:t>
-                      </a:r>
-                    </a:p>
-                  </a:txBody>
-                  <a:tcPr marL="101600" marR="101600" marT="38100" marB="38100" anchor="ctr">
-                    <a:solidFill>
-                      <a:srgbClr val="1A0F5C"/>
-                    </a:solidFill>
-                  </a:tcPr>
-                </a:tc>
-              </a:tr>
-              <a:tr h="335280">
-                <a:tc>
-                  <a:txBody>
-                    <a:bodyPr/>
-                    <a:lstStyle/>
-                    <a:p>
-                      <a:r>
-                        <a:rPr sz="1200" b="0" i="0">
+                        <a:rPr sz="1400" b="0" i="0">
                           <a:solidFill>
                             <a:srgbClr val="1A1440"/>
                           </a:solidFill>
                           <a:latin typeface="Calibri"/>
                         </a:rPr>
-                        <a:t>Total, absent read as zero</a:t>
+                        <a:t>Blanks read as zero</a:t>
                       </a:r>
                     </a:p>
                   </a:txBody>
@@ -26175,13 +26162,13 @@
                     <a:lstStyle/>
                     <a:p>
                       <a:r>
-                        <a:rPr sz="1200" b="0" i="0">
+                        <a:rPr sz="1400" b="0" i="0">
                           <a:solidFill>
                             <a:srgbClr val="1A1440"/>
                           </a:solidFill>
                           <a:latin typeface="Calibri"/>
                         </a:rPr>
-                        <a:t>Rs 5,000</a:t>
+                        <a:t>42.1%, 48 of 114</a:t>
                       </a:r>
                     </a:p>
                   </a:txBody>
@@ -26197,13 +26184,105 @@
                     <a:lstStyle/>
                     <a:p>
                       <a:r>
-                        <a:rPr sz="1200" b="0" i="0">
+                        <a:rPr sz="1400" b="0" i="0">
                           <a:solidFill>
                             <a:srgbClr val="1A1440"/>
                           </a:solidFill>
                           <a:latin typeface="Calibri"/>
                         </a:rPr>
-                        <a:t>Rs 4,600</a:t>
+                        <a:t>50.0%, 43 of 86</a:t>
+                      </a:r>
+                    </a:p>
+                  </a:txBody>
+                  <a:tcPr marL="101600" marR="101600" marT="38100" marB="38100" anchor="ctr">
+                    <a:solidFill>
+                      <a:srgbClr val="FFFFFF"/>
+                    </a:solidFill>
+                  </a:tcPr>
+                </a:tc>
+              </a:tr>
+              <a:tr h="369824">
+                <a:tc>
+                  <a:txBody>
+                    <a:bodyPr/>
+                    <a:lstStyle/>
+                    <a:p>
+                      <a:r>
+                        <a:rPr sz="1400" b="0" i="0">
+                          <a:solidFill>
+                            <a:srgbClr val="1A1440"/>
+                          </a:solidFill>
+                          <a:latin typeface="Calibri"/>
+                        </a:rPr>
+                        <a:t>No discount field (the check)</a:t>
+                      </a:r>
+                    </a:p>
+                  </a:txBody>
+                  <a:tcPr marL="101600" marR="101600" marT="38100" marB="38100" anchor="ctr">
+                    <a:solidFill>
+                      <a:srgbClr val="F4F2FA"/>
+                    </a:solidFill>
+                  </a:tcPr>
+                </a:tc>
+                <a:tc>
+                  <a:txBody>
+                    <a:bodyPr/>
+                    <a:lstStyle/>
+                    <a:p>
+                      <a:r>
+                        <a:rPr sz="1400" b="0" i="0">
+                          <a:solidFill>
+                            <a:srgbClr val="1A1440"/>
+                          </a:solidFill>
+                          <a:latin typeface="Calibri"/>
+                        </a:rPr>
+                        <a:t>32 orders</a:t>
+                      </a:r>
+                    </a:p>
+                  </a:txBody>
+                  <a:tcPr marL="101600" marR="101600" marT="38100" marB="38100" anchor="ctr">
+                    <a:solidFill>
+                      <a:srgbClr val="F4F2FA"/>
+                    </a:solidFill>
+                  </a:tcPr>
+                </a:tc>
+                <a:tc>
+                  <a:txBody>
+                    <a:bodyPr/>
+                    <a:lstStyle/>
+                    <a:p>
+                      <a:r>
+                        <a:rPr sz="1400" b="0" i="0">
+                          <a:solidFill>
+                            <a:srgbClr val="1A1440"/>
+                          </a:solidFill>
+                          <a:latin typeface="Calibri"/>
+                        </a:rPr>
+                        <a:t>26 orders</a:t>
+                      </a:r>
+                    </a:p>
+                  </a:txBody>
+                  <a:tcPr marL="101600" marR="101600" marT="38100" marB="38100" anchor="ctr">
+                    <a:solidFill>
+                      <a:srgbClr val="F4F2FA"/>
+                    </a:solidFill>
+                  </a:tcPr>
+                </a:tc>
+              </a:tr>
+              <a:tr h="369824">
+                <a:tc>
+                  <a:txBody>
+                    <a:bodyPr/>
+                    <a:lstStyle/>
+                    <a:p>
+                      <a:r>
+                        <a:rPr sz="1400" b="0" i="0">
+                          <a:solidFill>
+                            <a:srgbClr val="1A1440"/>
+                          </a:solidFill>
+                          <a:latin typeface="Calibri"/>
+                        </a:rPr>
+                        <a:t>Over orders that record the field</a:t>
                       </a:r>
                     </a:p>
                   </a:txBody>
@@ -26219,13 +26298,35 @@
                     <a:lstStyle/>
                     <a:p>
                       <a:r>
-                        <a:rPr sz="1200" b="0" i="0">
+                        <a:rPr sz="1400" b="0" i="0">
                           <a:solidFill>
                             <a:srgbClr val="1A1440"/>
                           </a:solidFill>
                           <a:latin typeface="Calibri"/>
                         </a:rPr>
-                        <a:t>-8.0%</a:t>
+                        <a:t>58.5%, 48 of 82</a:t>
+                      </a:r>
+                    </a:p>
+                  </a:txBody>
+                  <a:tcPr marL="101600" marR="101600" marT="38100" marB="38100" anchor="ctr">
+                    <a:solidFill>
+                      <a:srgbClr val="FFFFFF"/>
+                    </a:solidFill>
+                  </a:tcPr>
+                </a:tc>
+                <a:tc>
+                  <a:txBody>
+                    <a:bodyPr/>
+                    <a:lstStyle/>
+                    <a:p>
+                      <a:r>
+                        <a:rPr sz="1400" b="0" i="0">
+                          <a:solidFill>
+                            <a:srgbClr val="1A1440"/>
+                          </a:solidFill>
+                          <a:latin typeface="Calibri"/>
+                        </a:rPr>
+                        <a:t>71.7%, 43 of 60</a:t>
                       </a:r>
                     </a:p>
                   </a:txBody>
@@ -26236,20 +26337,20 @@
                   </a:tcPr>
                 </a:tc>
               </a:tr>
-              <a:tr h="335280">
+              <a:tr h="369824">
                 <a:tc>
                   <a:txBody>
                     <a:bodyPr/>
                     <a:lstStyle/>
                     <a:p>
                       <a:r>
-                        <a:rPr sz="1200" b="0" i="0">
+                        <a:rPr sz="1400" b="0" i="0">
                           <a:solidFill>
                             <a:srgbClr val="1A1440"/>
                           </a:solidFill>
                           <a:latin typeface="Calibri"/>
                         </a:rPr>
-                        <a:t>Average, recorded only</a:t>
+                        <a:t>Range, blanks unknown</a:t>
                       </a:r>
                     </a:p>
                   </a:txBody>
@@ -26265,13 +26366,13 @@
                     <a:lstStyle/>
                     <a:p>
                       <a:r>
-                        <a:rPr sz="1200" b="0" i="0">
+                        <a:rPr sz="1400" b="0" i="0">
                           <a:solidFill>
                             <a:srgbClr val="1A1440"/>
                           </a:solidFill>
                           <a:latin typeface="Calibri"/>
                         </a:rPr>
-                        <a:t>Rs 60.98</a:t>
+                        <a:t>42.1% to 70.2%</a:t>
                       </a:r>
                     </a:p>
                   </a:txBody>
@@ -26287,35 +26388,13 @@
                     <a:lstStyle/>
                     <a:p>
                       <a:r>
-                        <a:rPr sz="1200" b="0" i="0">
+                        <a:rPr sz="1400" b="0" i="0">
                           <a:solidFill>
                             <a:srgbClr val="1A1440"/>
                           </a:solidFill>
                           <a:latin typeface="Calibri"/>
                         </a:rPr>
-                        <a:t>Rs 76.67</a:t>
-                      </a:r>
-                    </a:p>
-                  </a:txBody>
-                  <a:tcPr marL="101600" marR="101600" marT="38100" marB="38100" anchor="ctr">
-                    <a:solidFill>
-                      <a:srgbClr val="F4F2FA"/>
-                    </a:solidFill>
-                  </a:tcPr>
-                </a:tc>
-                <a:tc>
-                  <a:txBody>
-                    <a:bodyPr/>
-                    <a:lstStyle/>
-                    <a:p>
-                      <a:r>
-                        <a:rPr sz="1200" b="0" i="0">
-                          <a:solidFill>
-                            <a:srgbClr val="1A1440"/>
-                          </a:solidFill>
-                          <a:latin typeface="Calibri"/>
-                        </a:rPr>
-                        <a:t>+25.7%</a:t>
+                        <a:t>50.0% to 80.2%</a:t>
                       </a:r>
                     </a:p>
                   </a:txBody>
@@ -26326,86 +26405,6 @@
                   </a:tcPr>
                 </a:tc>
               </a:tr>
-              <a:tr h="335280">
-                <a:tc>
-                  <a:txBody>
-                    <a:bodyPr/>
-                    <a:lstStyle/>
-                    <a:p>
-                      <a:r>
-                        <a:rPr sz="1200" b="0" i="0">
-                          <a:solidFill>
-                            <a:srgbClr val="1A1440"/>
-                          </a:solidFill>
-                          <a:latin typeface="Calibri"/>
-                        </a:rPr>
-                        <a:t>Most Q2 could give, Rs 150 on every order</a:t>
-                      </a:r>
-                    </a:p>
-                  </a:txBody>
-                  <a:tcPr marL="101600" marR="101600" marT="38100" marB="38100" anchor="ctr">
-                    <a:solidFill>
-                      <a:srgbClr val="FFFFFF"/>
-                    </a:solidFill>
-                  </a:tcPr>
-                </a:tc>
-                <a:tc>
-                  <a:txBody>
-                    <a:bodyPr/>
-                    <a:lstStyle/>
-                    <a:p/>
-                  </a:txBody>
-                  <a:tcPr marL="101600" marR="101600" marT="38100" marB="38100" anchor="ctr">
-                    <a:solidFill>
-                      <a:srgbClr val="FFFFFF"/>
-                    </a:solidFill>
-                  </a:tcPr>
-                </a:tc>
-                <a:tc>
-                  <a:txBody>
-                    <a:bodyPr/>
-                    <a:lstStyle/>
-                    <a:p>
-                      <a:r>
-                        <a:rPr sz="1200" b="0" i="0">
-                          <a:solidFill>
-                            <a:srgbClr val="1A1440"/>
-                          </a:solidFill>
-                          <a:latin typeface="Calibri"/>
-                        </a:rPr>
-                        <a:t>Rs 12,900</a:t>
-                      </a:r>
-                    </a:p>
-                  </a:txBody>
-                  <a:tcPr marL="101600" marR="101600" marT="38100" marB="38100" anchor="ctr">
-                    <a:solidFill>
-                      <a:srgbClr val="FFFFFF"/>
-                    </a:solidFill>
-                  </a:tcPr>
-                </a:tc>
-                <a:tc>
-                  <a:txBody>
-                    <a:bodyPr/>
-                    <a:lstStyle/>
-                    <a:p>
-                      <a:r>
-                        <a:rPr sz="1200" b="0" i="0">
-                          <a:solidFill>
-                            <a:srgbClr val="1A1440"/>
-                          </a:solidFill>
-                          <a:latin typeface="Calibri"/>
-                        </a:rPr>
-                        <a:t>of a Rs 23,00,000 fall</a:t>
-                      </a:r>
-                    </a:p>
-                  </a:txBody>
-                  <a:tcPr marL="101600" marR="101600" marT="38100" marB="38100" anchor="ctr">
-                    <a:solidFill>
-                      <a:srgbClr val="FFFFFF"/>
-                    </a:solidFill>
-                  </a:tcPr>
-                </a:tc>
-              </a:tr>
             </a:tbl>
           </a:graphicData>
         </a:graphic>
@@ -26418,8 +26417,8 @@
         </p:nvSpPr>
         <p:spPr>
           <a:xfrm>
-            <a:off x="530352" y="3553968"/>
-            <a:ext cx="11130991" cy="1074420"/>
+            <a:off x="530352" y="4061968"/>
+            <a:ext cx="11130991" cy="1341120"/>
           </a:xfrm>
           <a:prstGeom prst="roundRect">
             <a:avLst>
@@ -26466,8 +26465,8 @@
         </p:nvSpPr>
         <p:spPr>
           <a:xfrm>
-            <a:off x="676656" y="3681984"/>
-            <a:ext cx="45720" cy="818388"/>
+            <a:off x="676656" y="4189983"/>
+            <a:ext cx="45720" cy="1085088"/>
           </a:xfrm>
           <a:prstGeom prst="roundRect">
             <a:avLst>
@@ -26512,8 +26511,8 @@
         </p:nvSpPr>
         <p:spPr>
           <a:xfrm>
-            <a:off x="877824" y="3672840"/>
-            <a:ext cx="10564063" cy="891540"/>
+            <a:off x="877824" y="4180840"/>
+            <a:ext cx="10564063" cy="1158240"/>
           </a:xfrm>
           <a:prstGeom prst="rect">
             <a:avLst/>
@@ -26542,7 +26541,7 @@
                 </a:solidFill>
                 <a:latin typeface="Calibri"/>
               </a:rPr>
-              <a:t>Write the default with its reason: "absent means not recorded; reported separately; never summed as zero". Absence is rarely random, because some system or channel decided not to write the field, so the recorded orders may not speak for the rest; the worst-case bound closes the branch without guessing.</a:t>
+              <a:t>Write the default with its reason: "absent means not recorded; reported separately; never counted as zero". Only 17 of Q2's 86 orders are known to have had no discount, so the extension loses its premise; and at Rs 150 on every Q2 order, the most anyone recorded, the branch holds at most Rs 12,900 of a Rs 23,00,000 fall.</a:t>
             </a:r>
           </a:p>
         </p:txBody>
@@ -31605,7 +31604,7 @@
                 </a:solidFill>
                 <a:latin typeface="Calibri"/>
               </a:rPr>
-              <a:t>Week 1 Day 2: which branch moved</a:t>
+              <a:t>Week 1, Day 2. Which branch moved</a:t>
             </a:r>
           </a:p>
         </p:txBody>
@@ -37075,7 +37074,7 @@
                 </a:solidFill>
                 <a:latin typeface="Georgia"/>
               </a:rPr>
-              <a:t>Answer: one order moved the range, not the middle</a:t>
+              <a:t>Answer: one order stretched the range; the middle held</a:t>
             </a:r>
           </a:p>
         </p:txBody>
@@ -38323,7 +38322,7 @@
       </p:sp>
       <p:pic>
         <p:nvPicPr>
-          <p:cNvPr id="9" name="mermaid diagram" descr="e5c4706c80eb9847.png"/>
+          <p:cNvPr id="9" name="mermaid diagram" descr="d36382270481ac5e.png"/>
           <p:cNvPicPr>
             <a:picLocks noChangeAspect="1"/>
           </p:cNvPicPr>
